--- a/probability_and_statistics/2_descriptive/shape_of_distribution_skewness_kurtosis/Stats-Measure-of-shape-Skewness.pptx
+++ b/probability_and_statistics/2_descriptive/shape_of_distribution_skewness_kurtosis/Stats-Measure-of-shape-Skewness.pptx
@@ -227,7 +227,7 @@
           <a:p>
             <a:fld id="{7BAEECA8-D063-486F-AE31-5020270C1449}" type="datetimeFigureOut">
               <a:rPr lang="en-US" smtClean="0"/>
-              <a:t>11/7/2025</a:t>
+              <a:t>4/29/2026</a:t>
             </a:fld>
             <a:endParaRPr lang="en-US"/>
           </a:p>
@@ -432,7 +432,7 @@
           <a:p>
             <a:fld id="{0502D3FC-1898-47E1-B4BA-2070CF7359E4}" type="datetimeFigureOut">
               <a:rPr lang="en-US" smtClean="0"/>
-              <a:t>11/7/2025</a:t>
+              <a:t>4/29/2026</a:t>
             </a:fld>
             <a:endParaRPr lang="en-US"/>
           </a:p>
@@ -1254,7 +1254,7 @@
           <a:p>
             <a:fld id="{6383FAE1-13DE-4511-8C1B-C8AFB720664C}" type="datetimeFigureOut">
               <a:rPr lang="en-US" smtClean="0"/>
-              <a:t>11/7/2025</a:t>
+              <a:t>4/29/2026</a:t>
             </a:fld>
             <a:endParaRPr lang="en-US"/>
           </a:p>
@@ -1452,7 +1452,7 @@
           <a:p>
             <a:fld id="{6383FAE1-13DE-4511-8C1B-C8AFB720664C}" type="datetimeFigureOut">
               <a:rPr lang="en-US" smtClean="0"/>
-              <a:t>11/7/2025</a:t>
+              <a:t>4/29/2026</a:t>
             </a:fld>
             <a:endParaRPr lang="en-US"/>
           </a:p>
@@ -1660,7 +1660,7 @@
           <a:p>
             <a:fld id="{6383FAE1-13DE-4511-8C1B-C8AFB720664C}" type="datetimeFigureOut">
               <a:rPr lang="en-US" smtClean="0"/>
-              <a:t>11/7/2025</a:t>
+              <a:t>4/29/2026</a:t>
             </a:fld>
             <a:endParaRPr lang="en-US"/>
           </a:p>
@@ -1858,7 +1858,7 @@
           <a:p>
             <a:fld id="{6383FAE1-13DE-4511-8C1B-C8AFB720664C}" type="datetimeFigureOut">
               <a:rPr lang="en-US" smtClean="0"/>
-              <a:t>11/7/2025</a:t>
+              <a:t>4/29/2026</a:t>
             </a:fld>
             <a:endParaRPr lang="en-US"/>
           </a:p>
@@ -2133,7 +2133,7 @@
           <a:p>
             <a:fld id="{6383FAE1-13DE-4511-8C1B-C8AFB720664C}" type="datetimeFigureOut">
               <a:rPr lang="en-US" smtClean="0"/>
-              <a:t>11/7/2025</a:t>
+              <a:t>4/29/2026</a:t>
             </a:fld>
             <a:endParaRPr lang="en-US"/>
           </a:p>
@@ -2398,7 +2398,7 @@
           <a:p>
             <a:fld id="{6383FAE1-13DE-4511-8C1B-C8AFB720664C}" type="datetimeFigureOut">
               <a:rPr lang="en-US" smtClean="0"/>
-              <a:t>11/7/2025</a:t>
+              <a:t>4/29/2026</a:t>
             </a:fld>
             <a:endParaRPr lang="en-US"/>
           </a:p>
@@ -2810,7 +2810,7 @@
           <a:p>
             <a:fld id="{6383FAE1-13DE-4511-8C1B-C8AFB720664C}" type="datetimeFigureOut">
               <a:rPr lang="en-US" smtClean="0"/>
-              <a:t>11/7/2025</a:t>
+              <a:t>4/29/2026</a:t>
             </a:fld>
             <a:endParaRPr lang="en-US"/>
           </a:p>
@@ -2951,7 +2951,7 @@
           <a:p>
             <a:fld id="{6383FAE1-13DE-4511-8C1B-C8AFB720664C}" type="datetimeFigureOut">
               <a:rPr lang="en-US" smtClean="0"/>
-              <a:t>11/7/2025</a:t>
+              <a:t>4/29/2026</a:t>
             </a:fld>
             <a:endParaRPr lang="en-US"/>
           </a:p>
@@ -3064,7 +3064,7 @@
           <a:p>
             <a:fld id="{6383FAE1-13DE-4511-8C1B-C8AFB720664C}" type="datetimeFigureOut">
               <a:rPr lang="en-US" smtClean="0"/>
-              <a:t>11/7/2025</a:t>
+              <a:t>4/29/2026</a:t>
             </a:fld>
             <a:endParaRPr lang="en-US"/>
           </a:p>
@@ -3375,7 +3375,7 @@
           <a:p>
             <a:fld id="{6383FAE1-13DE-4511-8C1B-C8AFB720664C}" type="datetimeFigureOut">
               <a:rPr lang="en-US" smtClean="0"/>
-              <a:t>11/7/2025</a:t>
+              <a:t>4/29/2026</a:t>
             </a:fld>
             <a:endParaRPr lang="en-US"/>
           </a:p>
@@ -3666,7 +3666,7 @@
           <a:p>
             <a:fld id="{6383FAE1-13DE-4511-8C1B-C8AFB720664C}" type="datetimeFigureOut">
               <a:rPr lang="en-US" smtClean="0"/>
-              <a:t>11/7/2025</a:t>
+              <a:t>4/29/2026</a:t>
             </a:fld>
             <a:endParaRPr lang="en-US"/>
           </a:p>
@@ -3910,7 +3910,7 @@
           <a:p>
             <a:fld id="{6383FAE1-13DE-4511-8C1B-C8AFB720664C}" type="datetimeFigureOut">
               <a:rPr lang="en-US" smtClean="0"/>
-              <a:t>11/7/2025</a:t>
+              <a:t>4/29/2026</a:t>
             </a:fld>
             <a:endParaRPr lang="en-US"/>
           </a:p>
@@ -5017,7 +5017,7 @@
         <p:spPr>
           <a:xfrm>
             <a:off x="213559" y="1151672"/>
-            <a:ext cx="7092497" cy="5078313"/>
+            <a:ext cx="7092497" cy="4801314"/>
           </a:xfrm>
           <a:prstGeom prst="rect">
             <a:avLst/>
@@ -5165,15 +5165,35 @@
             <a:pPr marL="0" indent="0">
               <a:buNone/>
             </a:pPr>
-            <a:endParaRPr lang="en-US" dirty="0">
-              <a:solidFill>
-                <a:schemeClr val="accent6">
-                  <a:lumMod val="60000"/>
-                  <a:lumOff val="40000"/>
-                </a:schemeClr>
-              </a:solidFill>
-              <a:latin typeface="Calibri (Body)"/>
-            </a:endParaRPr>
+            <a:r>
+              <a:rPr lang="en-US" dirty="0">
+                <a:solidFill>
+                  <a:schemeClr val="accent6">
+                    <a:lumMod val="60000"/>
+                    <a:lumOff val="40000"/>
+                  </a:schemeClr>
+                </a:solidFill>
+                <a:latin typeface="Calibri (Body)"/>
+              </a:rPr>
+              <a:t>But sometimes the data is not symmetrical as shown in figure: </a:t>
+            </a:r>
+          </a:p>
+          <a:p>
+            <a:pPr marL="0" indent="0">
+              <a:buNone/>
+            </a:pPr>
+            <a:r>
+              <a:rPr lang="en-US" dirty="0">
+                <a:solidFill>
+                  <a:schemeClr val="accent6">
+                    <a:lumMod val="60000"/>
+                    <a:lumOff val="40000"/>
+                  </a:schemeClr>
+                </a:solidFill>
+                <a:latin typeface="Calibri (Body)"/>
+              </a:rPr>
+              <a:t>The curve can  be skewed – either to the right or to the left.</a:t>
+            </a:r>
           </a:p>
           <a:p>
             <a:pPr marL="0" indent="0">
@@ -5188,40 +5208,6 @@
               </a:solidFill>
               <a:latin typeface="Calibri (Body)"/>
             </a:endParaRPr>
-          </a:p>
-          <a:p>
-            <a:pPr marL="0" indent="0">
-              <a:buNone/>
-            </a:pPr>
-            <a:r>
-              <a:rPr lang="en-US" dirty="0">
-                <a:solidFill>
-                  <a:schemeClr val="accent6">
-                    <a:lumMod val="60000"/>
-                    <a:lumOff val="40000"/>
-                  </a:schemeClr>
-                </a:solidFill>
-                <a:latin typeface="Calibri (Body)"/>
-              </a:rPr>
-              <a:t>But sometimes the data is not symmetrical as shown in figure: </a:t>
-            </a:r>
-          </a:p>
-          <a:p>
-            <a:pPr marL="0" indent="0">
-              <a:buNone/>
-            </a:pPr>
-            <a:r>
-              <a:rPr lang="en-US" dirty="0">
-                <a:solidFill>
-                  <a:schemeClr val="accent6">
-                    <a:lumMod val="60000"/>
-                    <a:lumOff val="40000"/>
-                  </a:schemeClr>
-                </a:solidFill>
-                <a:latin typeface="Calibri (Body)"/>
-              </a:rPr>
-              <a:t>The curve can  be skewed – either to the right or to the left.</a:t>
-            </a:r>
           </a:p>
           <a:p>
             <a:pPr marL="0" indent="0">
@@ -6488,6 +6474,180 @@
       </p:grpSpPr>
       <p:sp>
         <p:nvSpPr>
+          <p:cNvPr id="12" name="TextBox 11">
+            <a:extLst>
+              <a:ext uri="{FF2B5EF4-FFF2-40B4-BE49-F238E27FC236}">
+                <a16:creationId xmlns:a16="http://schemas.microsoft.com/office/drawing/2014/main" id="{A29D6A40-A1FC-1035-283E-3AF77F6D04BE}"/>
+              </a:ext>
+            </a:extLst>
+          </p:cNvPr>
+          <p:cNvSpPr txBox="1"/>
+          <p:nvPr/>
+        </p:nvSpPr>
+        <p:spPr>
+          <a:xfrm>
+            <a:off x="446810" y="831195"/>
+            <a:ext cx="8873834" cy="3693319"/>
+          </a:xfrm>
+          <a:prstGeom prst="rect">
+            <a:avLst/>
+          </a:prstGeom>
+          <a:noFill/>
+        </p:spPr>
+        <p:txBody>
+          <a:bodyPr wrap="square">
+            <a:spAutoFit/>
+          </a:bodyPr>
+          <a:lstStyle/>
+          <a:p>
+            <a:r>
+              <a:rPr lang="en-US" dirty="0">
+                <a:solidFill>
+                  <a:schemeClr val="accent6">
+                    <a:lumMod val="60000"/>
+                    <a:lumOff val="40000"/>
+                  </a:schemeClr>
+                </a:solidFill>
+              </a:rPr>
+              <a:t>There are multiple formulas, but one common approach is </a:t>
+            </a:r>
+            <a:r>
+              <a:rPr lang="en-US" b="1" dirty="0">
+                <a:solidFill>
+                  <a:schemeClr val="accent6">
+                    <a:lumMod val="60000"/>
+                    <a:lumOff val="40000"/>
+                  </a:schemeClr>
+                </a:solidFill>
+              </a:rPr>
+              <a:t>Pearson’s Moment Coefficient of Skewness</a:t>
+            </a:r>
+            <a:r>
+              <a:rPr lang="en-US" dirty="0">
+                <a:solidFill>
+                  <a:schemeClr val="accent6">
+                    <a:lumMod val="60000"/>
+                    <a:lumOff val="40000"/>
+                  </a:schemeClr>
+                </a:solidFill>
+              </a:rPr>
+              <a:t>:</a:t>
+            </a:r>
+          </a:p>
+          <a:p>
+            <a:endParaRPr lang="en-US" dirty="0">
+              <a:solidFill>
+                <a:schemeClr val="accent6">
+                  <a:lumMod val="60000"/>
+                  <a:lumOff val="40000"/>
+                </a:schemeClr>
+              </a:solidFill>
+            </a:endParaRPr>
+          </a:p>
+          <a:p>
+            <a:endParaRPr lang="en-US" dirty="0">
+              <a:solidFill>
+                <a:schemeClr val="accent6">
+                  <a:lumMod val="60000"/>
+                  <a:lumOff val="40000"/>
+                </a:schemeClr>
+              </a:solidFill>
+            </a:endParaRPr>
+          </a:p>
+          <a:p>
+            <a:endParaRPr lang="en-US" dirty="0">
+              <a:solidFill>
+                <a:schemeClr val="accent6">
+                  <a:lumMod val="60000"/>
+                  <a:lumOff val="40000"/>
+                </a:schemeClr>
+              </a:solidFill>
+            </a:endParaRPr>
+          </a:p>
+          <a:p>
+            <a:endParaRPr lang="en-US" dirty="0">
+              <a:solidFill>
+                <a:schemeClr val="accent6">
+                  <a:lumMod val="60000"/>
+                  <a:lumOff val="40000"/>
+                </a:schemeClr>
+              </a:solidFill>
+            </a:endParaRPr>
+          </a:p>
+          <a:p>
+            <a:endParaRPr lang="en-US" dirty="0">
+              <a:solidFill>
+                <a:schemeClr val="accent6">
+                  <a:lumMod val="60000"/>
+                  <a:lumOff val="40000"/>
+                </a:schemeClr>
+              </a:solidFill>
+            </a:endParaRPr>
+          </a:p>
+          <a:p>
+            <a:endParaRPr lang="en-US" dirty="0">
+              <a:solidFill>
+                <a:schemeClr val="accent6">
+                  <a:lumMod val="60000"/>
+                  <a:lumOff val="40000"/>
+                </a:schemeClr>
+              </a:solidFill>
+            </a:endParaRPr>
+          </a:p>
+          <a:p>
+            <a:endParaRPr lang="en-US" dirty="0">
+              <a:solidFill>
+                <a:schemeClr val="accent6">
+                  <a:lumMod val="60000"/>
+                  <a:lumOff val="40000"/>
+                </a:schemeClr>
+              </a:solidFill>
+            </a:endParaRPr>
+          </a:p>
+          <a:p>
+            <a:endParaRPr lang="en-IN" dirty="0">
+              <a:solidFill>
+                <a:schemeClr val="accent6">
+                  <a:lumMod val="60000"/>
+                  <a:lumOff val="40000"/>
+                </a:schemeClr>
+              </a:solidFill>
+            </a:endParaRPr>
+          </a:p>
+          <a:p>
+            <a:endParaRPr lang="en-IN" dirty="0">
+              <a:solidFill>
+                <a:schemeClr val="accent6">
+                  <a:lumMod val="60000"/>
+                  <a:lumOff val="40000"/>
+                </a:schemeClr>
+              </a:solidFill>
+            </a:endParaRPr>
+          </a:p>
+          <a:p>
+            <a:endParaRPr lang="en-IN" dirty="0">
+              <a:solidFill>
+                <a:schemeClr val="accent6">
+                  <a:lumMod val="60000"/>
+                  <a:lumOff val="40000"/>
+                </a:schemeClr>
+              </a:solidFill>
+            </a:endParaRPr>
+          </a:p>
+          <a:p>
+            <a:endParaRPr lang="en-IN" dirty="0">
+              <a:solidFill>
+                <a:schemeClr val="accent6">
+                  <a:lumMod val="60000"/>
+                  <a:lumOff val="40000"/>
+                </a:schemeClr>
+              </a:solidFill>
+            </a:endParaRPr>
+          </a:p>
+        </p:txBody>
+      </p:sp>
+      <p:sp>
+        <p:nvSpPr>
           <p:cNvPr id="2" name="Title 1">
             <a:extLst>
               <a:ext uri="{FF2B5EF4-FFF2-40B4-BE49-F238E27FC236}">
@@ -6702,180 +6862,6 @@
           </a:prstGeom>
         </p:spPr>
       </p:pic>
-      <p:sp>
-        <p:nvSpPr>
-          <p:cNvPr id="12" name="TextBox 11">
-            <a:extLst>
-              <a:ext uri="{FF2B5EF4-FFF2-40B4-BE49-F238E27FC236}">
-                <a16:creationId xmlns:a16="http://schemas.microsoft.com/office/drawing/2014/main" id="{A29D6A40-A1FC-1035-283E-3AF77F6D04BE}"/>
-              </a:ext>
-            </a:extLst>
-          </p:cNvPr>
-          <p:cNvSpPr txBox="1"/>
-          <p:nvPr/>
-        </p:nvSpPr>
-        <p:spPr>
-          <a:xfrm>
-            <a:off x="446810" y="831195"/>
-            <a:ext cx="8873834" cy="3693319"/>
-          </a:xfrm>
-          <a:prstGeom prst="rect">
-            <a:avLst/>
-          </a:prstGeom>
-          <a:noFill/>
-        </p:spPr>
-        <p:txBody>
-          <a:bodyPr wrap="square">
-            <a:spAutoFit/>
-          </a:bodyPr>
-          <a:lstStyle/>
-          <a:p>
-            <a:r>
-              <a:rPr lang="en-US" dirty="0">
-                <a:solidFill>
-                  <a:schemeClr val="accent6">
-                    <a:lumMod val="60000"/>
-                    <a:lumOff val="40000"/>
-                  </a:schemeClr>
-                </a:solidFill>
-              </a:rPr>
-              <a:t>There are multiple formulas, but one common approach is </a:t>
-            </a:r>
-            <a:r>
-              <a:rPr lang="en-US" b="1" dirty="0">
-                <a:solidFill>
-                  <a:schemeClr val="accent6">
-                    <a:lumMod val="60000"/>
-                    <a:lumOff val="40000"/>
-                  </a:schemeClr>
-                </a:solidFill>
-              </a:rPr>
-              <a:t>Pearson’s Moment Coefficient of Skewness</a:t>
-            </a:r>
-            <a:r>
-              <a:rPr lang="en-US" dirty="0">
-                <a:solidFill>
-                  <a:schemeClr val="accent6">
-                    <a:lumMod val="60000"/>
-                    <a:lumOff val="40000"/>
-                  </a:schemeClr>
-                </a:solidFill>
-              </a:rPr>
-              <a:t>:</a:t>
-            </a:r>
-          </a:p>
-          <a:p>
-            <a:endParaRPr lang="en-US" dirty="0">
-              <a:solidFill>
-                <a:schemeClr val="accent6">
-                  <a:lumMod val="60000"/>
-                  <a:lumOff val="40000"/>
-                </a:schemeClr>
-              </a:solidFill>
-            </a:endParaRPr>
-          </a:p>
-          <a:p>
-            <a:endParaRPr lang="en-US" dirty="0">
-              <a:solidFill>
-                <a:schemeClr val="accent6">
-                  <a:lumMod val="60000"/>
-                  <a:lumOff val="40000"/>
-                </a:schemeClr>
-              </a:solidFill>
-            </a:endParaRPr>
-          </a:p>
-          <a:p>
-            <a:endParaRPr lang="en-US" dirty="0">
-              <a:solidFill>
-                <a:schemeClr val="accent6">
-                  <a:lumMod val="60000"/>
-                  <a:lumOff val="40000"/>
-                </a:schemeClr>
-              </a:solidFill>
-            </a:endParaRPr>
-          </a:p>
-          <a:p>
-            <a:endParaRPr lang="en-US" dirty="0">
-              <a:solidFill>
-                <a:schemeClr val="accent6">
-                  <a:lumMod val="60000"/>
-                  <a:lumOff val="40000"/>
-                </a:schemeClr>
-              </a:solidFill>
-            </a:endParaRPr>
-          </a:p>
-          <a:p>
-            <a:endParaRPr lang="en-US" dirty="0">
-              <a:solidFill>
-                <a:schemeClr val="accent6">
-                  <a:lumMod val="60000"/>
-                  <a:lumOff val="40000"/>
-                </a:schemeClr>
-              </a:solidFill>
-            </a:endParaRPr>
-          </a:p>
-          <a:p>
-            <a:endParaRPr lang="en-US" dirty="0">
-              <a:solidFill>
-                <a:schemeClr val="accent6">
-                  <a:lumMod val="60000"/>
-                  <a:lumOff val="40000"/>
-                </a:schemeClr>
-              </a:solidFill>
-            </a:endParaRPr>
-          </a:p>
-          <a:p>
-            <a:endParaRPr lang="en-US" dirty="0">
-              <a:solidFill>
-                <a:schemeClr val="accent6">
-                  <a:lumMod val="60000"/>
-                  <a:lumOff val="40000"/>
-                </a:schemeClr>
-              </a:solidFill>
-            </a:endParaRPr>
-          </a:p>
-          <a:p>
-            <a:endParaRPr lang="en-IN" dirty="0">
-              <a:solidFill>
-                <a:schemeClr val="accent6">
-                  <a:lumMod val="60000"/>
-                  <a:lumOff val="40000"/>
-                </a:schemeClr>
-              </a:solidFill>
-            </a:endParaRPr>
-          </a:p>
-          <a:p>
-            <a:endParaRPr lang="en-IN" dirty="0">
-              <a:solidFill>
-                <a:schemeClr val="accent6">
-                  <a:lumMod val="60000"/>
-                  <a:lumOff val="40000"/>
-                </a:schemeClr>
-              </a:solidFill>
-            </a:endParaRPr>
-          </a:p>
-          <a:p>
-            <a:endParaRPr lang="en-IN" dirty="0">
-              <a:solidFill>
-                <a:schemeClr val="accent6">
-                  <a:lumMod val="60000"/>
-                  <a:lumOff val="40000"/>
-                </a:schemeClr>
-              </a:solidFill>
-            </a:endParaRPr>
-          </a:p>
-          <a:p>
-            <a:endParaRPr lang="en-IN" dirty="0">
-              <a:solidFill>
-                <a:schemeClr val="accent6">
-                  <a:lumMod val="60000"/>
-                  <a:lumOff val="40000"/>
-                </a:schemeClr>
-              </a:solidFill>
-            </a:endParaRPr>
-          </a:p>
-        </p:txBody>
-      </p:sp>
     </p:spTree>
     <p:extLst>
       <p:ext uri="{BB962C8B-B14F-4D97-AF65-F5344CB8AC3E}">
